--- a/topic06/talk-2/ReactJS_03.pptx
+++ b/topic06/talk-2/ReactJS_03.pptx
@@ -177,15 +177,6 @@
 </p:cmAuthorLst>
 </file>
 
-<file path=ppt/comments/comment1.xml><?xml version="1.0" encoding="utf-8"?>
-<p:cmLst xmlns:a="http://schemas.openxmlformats.org/drawingml/2006/main" xmlns:r="http://schemas.openxmlformats.org/officeDocument/2006/relationships" xmlns:p="http://schemas.openxmlformats.org/presentationml/2006/main">
-  <p:cm authorId="1" dt="2020-02-04T08:36:33.764" idx="2">
-    <p:pos x="698" y="930"/>
-    <p:text/>
-  </p:cm>
-</p:cmLst>
-</file>
-
 <file path=ppt/handoutMasters/handoutMaster1.xml><?xml version="1.0" encoding="utf-8"?>
 <p:handoutMaster xmlns:a="http://schemas.openxmlformats.org/drawingml/2006/main" xmlns:r="http://schemas.openxmlformats.org/officeDocument/2006/relationships" xmlns:p="http://schemas.openxmlformats.org/presentationml/2006/main">
   <p:cSld>
@@ -303,7 +294,7 @@
               <a:pPr>
                 <a:defRPr/>
               </a:pPr>
-              <a:t>6/5/2024</a:t>
+              <a:t>3/23/2026</a:t>
             </a:fld>
             <a:endParaRPr lang="en-US" altLang="en-US"/>
           </a:p>
@@ -11992,10 +11983,10 @@
       </p:graphicFrame>
       <p:pic>
         <p:nvPicPr>
-          <p:cNvPr id="4" name="Picture 3">
+          <p:cNvPr id="5" name="Picture 4">
             <a:extLst>
               <a:ext uri="{FF2B5EF4-FFF2-40B4-BE49-F238E27FC236}">
-                <a16:creationId xmlns:a16="http://schemas.microsoft.com/office/drawing/2014/main" id="{B7FEF8F9-0093-A493-E688-1E566EBCCA06}"/>
+                <a16:creationId xmlns:a16="http://schemas.microsoft.com/office/drawing/2014/main" id="{E4FF4EC6-1C39-3D62-BB90-EBE5BC60286A}"/>
               </a:ext>
             </a:extLst>
           </p:cNvPr>
@@ -12012,8 +12003,8 @@
         </p:blipFill>
         <p:spPr>
           <a:xfrm>
-            <a:off x="5353594" y="457200"/>
-            <a:ext cx="6744150" cy="2743200"/>
+            <a:off x="5276599" y="554419"/>
+            <a:ext cx="6113508" cy="2798381"/>
           </a:xfrm>
           <a:prstGeom prst="rect">
             <a:avLst/>
@@ -12957,10 +12948,10 @@
       </p:pic>
       <p:pic>
         <p:nvPicPr>
-          <p:cNvPr id="4" name="Picture 3">
+          <p:cNvPr id="5" name="Picture 4">
             <a:extLst>
               <a:ext uri="{FF2B5EF4-FFF2-40B4-BE49-F238E27FC236}">
-                <a16:creationId xmlns:a16="http://schemas.microsoft.com/office/drawing/2014/main" id="{5D1FCB61-E481-138C-D64D-4858BF50007B}"/>
+                <a16:creationId xmlns:a16="http://schemas.microsoft.com/office/drawing/2014/main" id="{1A6D061C-C682-7126-C712-5ECA7D4C6496}"/>
               </a:ext>
             </a:extLst>
           </p:cNvPr>
@@ -12977,8 +12968,8 @@
         </p:blipFill>
         <p:spPr>
           <a:xfrm>
-            <a:off x="8153400" y="1227399"/>
-            <a:ext cx="3729177" cy="3581400"/>
+            <a:off x="6191693" y="2311342"/>
+            <a:ext cx="4883401" cy="2235315"/>
           </a:xfrm>
           <a:prstGeom prst="rect">
             <a:avLst/>
@@ -13171,7 +13162,7 @@
 </file>
 
 <file path=ppt/slides/slide6.xml><?xml version="1.0" encoding="utf-8"?>
-<p:sld xmlns:a="http://schemas.openxmlformats.org/drawingml/2006/main" xmlns:r="http://schemas.openxmlformats.org/officeDocument/2006/relationships" xmlns:p="http://schemas.openxmlformats.org/presentationml/2006/main">
+<p:sld xmlns:a="http://schemas.openxmlformats.org/drawingml/2006/main" xmlns:r="http://schemas.openxmlformats.org/officeDocument/2006/relationships" xmlns:p="http://schemas.openxmlformats.org/presentationml/2006/main" show="0">
   <p:cSld>
     <p:spTree>
       <p:nvGrpSpPr>
@@ -14463,10 +14454,10 @@
       </p:cxnSp>
       <p:pic>
         <p:nvPicPr>
-          <p:cNvPr id="5" name="Picture 4">
+          <p:cNvPr id="3" name="Picture 2">
             <a:extLst>
               <a:ext uri="{FF2B5EF4-FFF2-40B4-BE49-F238E27FC236}">
-                <a16:creationId xmlns:a16="http://schemas.microsoft.com/office/drawing/2014/main" id="{440E842A-CF56-2109-30EA-FE461825682F}"/>
+                <a16:creationId xmlns:a16="http://schemas.microsoft.com/office/drawing/2014/main" id="{FC04481B-9FD1-C105-CDE5-FDCFC8B3371D}"/>
               </a:ext>
             </a:extLst>
           </p:cNvPr>
@@ -14483,8 +14474,8 @@
         </p:blipFill>
         <p:spPr>
           <a:xfrm>
-            <a:off x="3276600" y="1066800"/>
-            <a:ext cx="4980250" cy="2825751"/>
+            <a:off x="3074682" y="1180286"/>
+            <a:ext cx="5231118" cy="2790513"/>
           </a:xfrm>
           <a:prstGeom prst="rect">
             <a:avLst/>
@@ -15924,10 +15915,10 @@
       </p:sp>
       <p:pic>
         <p:nvPicPr>
-          <p:cNvPr id="4" name="Picture 3">
+          <p:cNvPr id="3" name="Picture 2">
             <a:extLst>
               <a:ext uri="{FF2B5EF4-FFF2-40B4-BE49-F238E27FC236}">
-                <a16:creationId xmlns:a16="http://schemas.microsoft.com/office/drawing/2014/main" id="{C621798F-6652-0227-243F-88A6200CA439}"/>
+                <a16:creationId xmlns:a16="http://schemas.microsoft.com/office/drawing/2014/main" id="{8486EDD1-4470-BC72-EA47-322CAF3826B0}"/>
               </a:ext>
             </a:extLst>
           </p:cNvPr>
@@ -15944,8 +15935,8 @@
         </p:blipFill>
         <p:spPr>
           <a:xfrm>
-            <a:off x="2705593" y="1219200"/>
-            <a:ext cx="6038185" cy="3140076"/>
+            <a:off x="3124200" y="1219200"/>
+            <a:ext cx="5131064" cy="2959252"/>
           </a:xfrm>
           <a:prstGeom prst="rect">
             <a:avLst/>

--- a/topic06/talk-2/ReactJS_03.pptx
+++ b/topic06/talk-2/ReactJS_03.pptx
@@ -5,10 +5,10 @@
     <p:sldMasterId id="2147483756" r:id="rId1"/>
   </p:sldMasterIdLst>
   <p:notesMasterIdLst>
-    <p:notesMasterId r:id="rId15"/>
+    <p:notesMasterId r:id="rId14"/>
   </p:notesMasterIdLst>
   <p:handoutMasterIdLst>
-    <p:handoutMasterId r:id="rId16"/>
+    <p:handoutMasterId r:id="rId15"/>
   </p:handoutMasterIdLst>
   <p:sldIdLst>
     <p:sldId id="645" r:id="rId2"/>
@@ -23,7 +23,6 @@
     <p:sldId id="655" r:id="rId11"/>
     <p:sldId id="705" r:id="rId12"/>
     <p:sldId id="703" r:id="rId13"/>
-    <p:sldId id="696" r:id="rId14"/>
   </p:sldIdLst>
   <p:sldSz cx="12192000" cy="6858000"/>
   <p:notesSz cx="6858000" cy="9144000"/>
@@ -294,7 +293,7 @@
               <a:pPr>
                 <a:defRPr/>
               </a:pPr>
-              <a:t>3/23/2026</a:t>
+              <a:t>3/24/2026</a:t>
             </a:fld>
             <a:endParaRPr lang="en-US" altLang="en-US"/>
           </a:p>
@@ -405,6 +404,118 @@
   <p:clrMap bg1="lt1" tx1="dk1" bg2="lt2" tx2="dk2" accent1="accent1" accent2="accent2" accent3="accent3" accent4="accent4" accent5="accent5" accent6="accent6" hlink="hlink" folHlink="folHlink"/>
   <p:hf hdr="0" ftr="0" dt="0"/>
 </p:handoutMaster>
+</file>
+
+<file path=ppt/ink/ink1.xml><?xml version="1.0" encoding="utf-8"?>
+<inkml:ink xmlns:inkml="http://www.w3.org/2003/InkML">
+  <inkml:definitions>
+    <inkml:context xml:id="ctx0">
+      <inkml:inkSource xml:id="inkSrc0">
+        <inkml:traceFormat>
+          <inkml:channel name="X" type="integer" min="-2.14748E9" max="2.14748E9" units="cm"/>
+          <inkml:channel name="Y" type="integer" min="-2.14748E9" max="2.14748E9" units="cm"/>
+          <inkml:channel name="F" type="integer" max="32767" units="dev"/>
+        </inkml:traceFormat>
+        <inkml:channelProperties>
+          <inkml:channelProperty channel="X" name="resolution" value="1000" units="1/cm"/>
+          <inkml:channelProperty channel="Y" name="resolution" value="1000" units="1/cm"/>
+          <inkml:channelProperty channel="F" name="resolution" value="0" units="1/dev"/>
+        </inkml:channelProperties>
+      </inkml:inkSource>
+      <inkml:timestamp xml:id="ts0" timeString="2026-03-24T09:10:48.583"/>
+    </inkml:context>
+    <inkml:brush xml:id="br0">
+      <inkml:brushProperty name="width" value="0.035" units="cm"/>
+      <inkml:brushProperty name="height" value="0.035" units="cm"/>
+      <inkml:brushProperty name="color" value="#E71224"/>
+    </inkml:brush>
+  </inkml:definitions>
+  <inkml:trace contextRef="#ctx0" brushRef="#br0">1 787 24221,'5769'-786'0</inkml:trace>
+</inkml:ink>
+</file>
+
+<file path=ppt/ink/ink2.xml><?xml version="1.0" encoding="utf-8"?>
+<inkml:ink xmlns:inkml="http://www.w3.org/2003/InkML">
+  <inkml:definitions>
+    <inkml:context xml:id="ctx0">
+      <inkml:inkSource xml:id="inkSrc0">
+        <inkml:traceFormat>
+          <inkml:channel name="X" type="integer" min="-2.14748E9" max="2.14748E9" units="cm"/>
+          <inkml:channel name="Y" type="integer" min="-2.14748E9" max="2.14748E9" units="cm"/>
+          <inkml:channel name="F" type="integer" max="32767" units="dev"/>
+        </inkml:traceFormat>
+        <inkml:channelProperties>
+          <inkml:channelProperty channel="X" name="resolution" value="1000" units="1/cm"/>
+          <inkml:channelProperty channel="Y" name="resolution" value="1000" units="1/cm"/>
+          <inkml:channelProperty channel="F" name="resolution" value="0" units="1/dev"/>
+        </inkml:channelProperties>
+      </inkml:inkSource>
+      <inkml:timestamp xml:id="ts0" timeString="2026-03-24T09:10:51.418"/>
+    </inkml:context>
+    <inkml:brush xml:id="br0">
+      <inkml:brushProperty name="width" value="0.035" units="cm"/>
+      <inkml:brushProperty name="height" value="0.035" units="cm"/>
+      <inkml:brushProperty name="color" value="#E71224"/>
+    </inkml:brush>
+  </inkml:definitions>
+  <inkml:trace contextRef="#ctx0" brushRef="#br0">434 19 23511,'-434'-18'0</inkml:trace>
+</inkml:ink>
+</file>
+
+<file path=ppt/ink/ink3.xml><?xml version="1.0" encoding="utf-8"?>
+<inkml:ink xmlns:inkml="http://www.w3.org/2003/InkML">
+  <inkml:definitions>
+    <inkml:context xml:id="ctx0">
+      <inkml:inkSource xml:id="inkSrc0">
+        <inkml:traceFormat>
+          <inkml:channel name="X" type="integer" min="-2.14748E9" max="2.14748E9" units="cm"/>
+          <inkml:channel name="Y" type="integer" min="-2.14748E9" max="2.14748E9" units="cm"/>
+          <inkml:channel name="F" type="integer" max="32767" units="dev"/>
+        </inkml:traceFormat>
+        <inkml:channelProperties>
+          <inkml:channelProperty channel="X" name="resolution" value="1000" units="1/cm"/>
+          <inkml:channelProperty channel="Y" name="resolution" value="1000" units="1/cm"/>
+          <inkml:channelProperty channel="F" name="resolution" value="0" units="1/dev"/>
+        </inkml:channelProperties>
+      </inkml:inkSource>
+      <inkml:timestamp xml:id="ts0" timeString="2026-03-24T09:10:54.110"/>
+    </inkml:context>
+    <inkml:brush xml:id="br0">
+      <inkml:brushProperty name="width" value="0.035" units="cm"/>
+      <inkml:brushProperty name="height" value="0.035" units="cm"/>
+      <inkml:brushProperty name="color" value="#E71224"/>
+    </inkml:brush>
+  </inkml:definitions>
+  <inkml:trace contextRef="#ctx0" brushRef="#br0">300 1 24575,'0'1'0,"0"-1"0,-1 1 0,1 0 0,0-1 0,0 1 0,-1-1 0,1 1 0,0 0 0,-1-1 0,1 1 0,0-1 0,-1 1 0,1-1 0,-1 1 0,1-1 0,-1 1 0,1-1 0,-1 0 0,1 1 0,-1-1 0,0 0 0,1 1 0,-1-1 0,0 0 0,0 1 0,-23 5 0,7-1 0,-19 17 0,29-16 0,-1-1 0,0 0 0,-1 0 0,-11 4 0,7-4 0,-1 1 0,-17 12 0,19-11 0,0 0 0,-24 9 0,8-5-1365,16-6-5461</inkml:trace>
+</inkml:ink>
+</file>
+
+<file path=ppt/ink/ink4.xml><?xml version="1.0" encoding="utf-8"?>
+<inkml:ink xmlns:inkml="http://www.w3.org/2003/InkML">
+  <inkml:definitions>
+    <inkml:context xml:id="ctx0">
+      <inkml:inkSource xml:id="inkSrc0">
+        <inkml:traceFormat>
+          <inkml:channel name="X" type="integer" min="-2.14748E9" max="2.14748E9" units="cm"/>
+          <inkml:channel name="Y" type="integer" min="-2.14748E9" max="2.14748E9" units="cm"/>
+          <inkml:channel name="F" type="integer" max="32767" units="dev"/>
+        </inkml:traceFormat>
+        <inkml:channelProperties>
+          <inkml:channelProperty channel="X" name="resolution" value="1000" units="1/cm"/>
+          <inkml:channelProperty channel="Y" name="resolution" value="1000" units="1/cm"/>
+          <inkml:channelProperty channel="F" name="resolution" value="0" units="1/dev"/>
+        </inkml:channelProperties>
+      </inkml:inkSource>
+      <inkml:timestamp xml:id="ts0" timeString="2026-03-24T09:10:54.495"/>
+    </inkml:context>
+    <inkml:brush xml:id="br0">
+      <inkml:brushProperty name="width" value="0.035" units="cm"/>
+      <inkml:brushProperty name="height" value="0.035" units="cm"/>
+      <inkml:brushProperty name="color" value="#E71224"/>
+    </inkml:brush>
+  </inkml:definitions>
+  <inkml:trace contextRef="#ctx0" brushRef="#br0">0 1 24575,'0'0'-8191</inkml:trace>
+</inkml:ink>
 </file>
 
 <file path=ppt/notesMasters/notesMaster1.xml><?xml version="1.0" encoding="utf-8"?>
@@ -7698,326 +7809,6 @@
 </p:sld>
 </file>
 
-<file path=ppt/slides/slide13.xml><?xml version="1.0" encoding="utf-8"?>
-<p:sld xmlns:a="http://schemas.openxmlformats.org/drawingml/2006/main" xmlns:r="http://schemas.openxmlformats.org/officeDocument/2006/relationships" xmlns:p="http://schemas.openxmlformats.org/presentationml/2006/main">
-  <p:cSld>
-    <p:spTree>
-      <p:nvGrpSpPr>
-        <p:cNvPr id="1" name=""/>
-        <p:cNvGrpSpPr/>
-        <p:nvPr/>
-      </p:nvGrpSpPr>
-      <p:grpSpPr>
-        <a:xfrm>
-          <a:off x="0" y="0"/>
-          <a:ext cx="0" cy="0"/>
-          <a:chOff x="0" y="0"/>
-          <a:chExt cx="0" cy="0"/>
-        </a:xfrm>
-      </p:grpSpPr>
-      <p:sp>
-        <p:nvSpPr>
-          <p:cNvPr id="29697" name="Title 1">
-            <a:extLst>
-              <a:ext uri="{FF2B5EF4-FFF2-40B4-BE49-F238E27FC236}">
-                <a16:creationId xmlns:a16="http://schemas.microsoft.com/office/drawing/2014/main" id="{BFBAA9B2-8BFD-06E4-316B-332C5F182605}"/>
-              </a:ext>
-            </a:extLst>
-          </p:cNvPr>
-          <p:cNvSpPr>
-            <a:spLocks noGrp="1"/>
-          </p:cNvSpPr>
-          <p:nvPr>
-            <p:ph type="title"/>
-          </p:nvPr>
-        </p:nvSpPr>
-        <p:spPr/>
-        <p:txBody>
-          <a:bodyPr/>
-          <a:lstStyle/>
-          <a:p>
-            <a:endParaRPr lang="en-US" altLang="en-US">
-              <a:ea typeface="ＭＳ Ｐゴシック" panose="020B0600070205080204" pitchFamily="34" charset="-128"/>
-            </a:endParaRPr>
-          </a:p>
-        </p:txBody>
-      </p:sp>
-      <p:sp>
-        <p:nvSpPr>
-          <p:cNvPr id="29698" name="Content Placeholder 2">
-            <a:extLst>
-              <a:ext uri="{FF2B5EF4-FFF2-40B4-BE49-F238E27FC236}">
-                <a16:creationId xmlns:a16="http://schemas.microsoft.com/office/drawing/2014/main" id="{727EF5C2-0E49-7119-A0A6-8AC9853AA20A}"/>
-              </a:ext>
-            </a:extLst>
-          </p:cNvPr>
-          <p:cNvSpPr>
-            <a:spLocks noGrp="1"/>
-          </p:cNvSpPr>
-          <p:nvPr>
-            <p:ph idx="1"/>
-          </p:nvPr>
-        </p:nvSpPr>
-        <p:spPr/>
-        <p:txBody>
-          <a:bodyPr/>
-          <a:lstStyle/>
-          <a:p>
-            <a:endParaRPr lang="en-US" altLang="en-US">
-              <a:ea typeface="ＭＳ Ｐゴシック" panose="020B0600070205080204" pitchFamily="34" charset="-128"/>
-            </a:endParaRPr>
-          </a:p>
-        </p:txBody>
-      </p:sp>
-      <p:sp>
-        <p:nvSpPr>
-          <p:cNvPr id="4" name="Footer Placeholder 3">
-            <a:extLst>
-              <a:ext uri="{FF2B5EF4-FFF2-40B4-BE49-F238E27FC236}">
-                <a16:creationId xmlns:a16="http://schemas.microsoft.com/office/drawing/2014/main" id="{60B9BCB2-1BE7-E875-10D0-C63A4768C460}"/>
-              </a:ext>
-            </a:extLst>
-          </p:cNvPr>
-          <p:cNvSpPr>
-            <a:spLocks noGrp="1"/>
-          </p:cNvSpPr>
-          <p:nvPr>
-            <p:ph type="ftr" sz="quarter" idx="11"/>
-          </p:nvPr>
-        </p:nvSpPr>
-        <p:spPr/>
-        <p:txBody>
-          <a:bodyPr/>
-          <a:lstStyle/>
-          <a:p>
-            <a:pPr>
-              <a:defRPr/>
-            </a:pPr>
-            <a:endParaRPr lang="en-US"/>
-          </a:p>
-        </p:txBody>
-      </p:sp>
-      <p:sp>
-        <p:nvSpPr>
-          <p:cNvPr id="29700" name="Slide Number Placeholder 4">
-            <a:extLst>
-              <a:ext uri="{FF2B5EF4-FFF2-40B4-BE49-F238E27FC236}">
-                <a16:creationId xmlns:a16="http://schemas.microsoft.com/office/drawing/2014/main" id="{52F0C4F9-6197-BE74-DFD9-32063B11588C}"/>
-              </a:ext>
-            </a:extLst>
-          </p:cNvPr>
-          <p:cNvSpPr>
-            <a:spLocks noGrp="1" noChangeArrowheads="1"/>
-          </p:cNvSpPr>
-          <p:nvPr>
-            <p:ph type="sldNum" sz="quarter" idx="12"/>
-          </p:nvPr>
-        </p:nvSpPr>
-        <p:spPr bwMode="auto">
-          <a:noFill/>
-          <a:extLst>
-            <a:ext uri="{909E8E84-426E-40DD-AFC4-6F175D3DCCD1}">
-              <a14:hiddenFill xmlns:a14="http://schemas.microsoft.com/office/drawing/2010/main">
-                <a:solidFill>
-                  <a:srgbClr val="FFFFFF"/>
-                </a:solidFill>
-              </a14:hiddenFill>
-            </a:ext>
-            <a:ext uri="{91240B29-F687-4F45-9708-019B960494DF}">
-              <a14:hiddenLine xmlns:a14="http://schemas.microsoft.com/office/drawing/2010/main" w="9525">
-                <a:solidFill>
-                  <a:srgbClr val="000000"/>
-                </a:solidFill>
-                <a:miter lim="800000"/>
-                <a:headEnd/>
-                <a:tailEnd/>
-              </a14:hiddenLine>
-            </a:ext>
-          </a:extLst>
-        </p:spPr>
-        <p:txBody>
-          <a:bodyPr/>
-          <a:lstStyle>
-            <a:lvl1pPr>
-              <a:spcBef>
-                <a:spcPct val="20000"/>
-              </a:spcBef>
-              <a:buFont typeface="Arial" panose="020B0604020202020204" pitchFamily="34" charset="0"/>
-              <a:buChar char="•"/>
-              <a:defRPr sz="3200">
-                <a:solidFill>
-                  <a:schemeClr val="tx1"/>
-                </a:solidFill>
-                <a:latin typeface="Calibri" panose="020F0502020204030204" pitchFamily="34" charset="0"/>
-                <a:ea typeface="ＭＳ Ｐゴシック" panose="020B0600070205080204" pitchFamily="34" charset="-128"/>
-              </a:defRPr>
-            </a:lvl1pPr>
-            <a:lvl2pPr marL="742950" indent="-285750">
-              <a:spcBef>
-                <a:spcPct val="20000"/>
-              </a:spcBef>
-              <a:buFont typeface="Arial" panose="020B0604020202020204" pitchFamily="34" charset="0"/>
-              <a:buChar char="–"/>
-              <a:defRPr sz="2800">
-                <a:solidFill>
-                  <a:schemeClr val="tx1"/>
-                </a:solidFill>
-                <a:latin typeface="Calibri" panose="020F0502020204030204" pitchFamily="34" charset="0"/>
-                <a:ea typeface="ＭＳ Ｐゴシック" panose="020B0600070205080204" pitchFamily="34" charset="-128"/>
-              </a:defRPr>
-            </a:lvl2pPr>
-            <a:lvl3pPr marL="1143000" indent="-228600">
-              <a:spcBef>
-                <a:spcPct val="20000"/>
-              </a:spcBef>
-              <a:buFont typeface="Arial" panose="020B0604020202020204" pitchFamily="34" charset="0"/>
-              <a:buChar char="•"/>
-              <a:defRPr sz="2400">
-                <a:solidFill>
-                  <a:schemeClr val="tx1"/>
-                </a:solidFill>
-                <a:latin typeface="Calibri" panose="020F0502020204030204" pitchFamily="34" charset="0"/>
-                <a:ea typeface="ＭＳ Ｐゴシック" panose="020B0600070205080204" pitchFamily="34" charset="-128"/>
-              </a:defRPr>
-            </a:lvl3pPr>
-            <a:lvl4pPr marL="1600200" indent="-228600">
-              <a:spcBef>
-                <a:spcPct val="20000"/>
-              </a:spcBef>
-              <a:buFont typeface="Arial" panose="020B0604020202020204" pitchFamily="34" charset="0"/>
-              <a:buChar char="–"/>
-              <a:defRPr sz="2000">
-                <a:solidFill>
-                  <a:schemeClr val="tx1"/>
-                </a:solidFill>
-                <a:latin typeface="Calibri" panose="020F0502020204030204" pitchFamily="34" charset="0"/>
-                <a:ea typeface="ＭＳ Ｐゴシック" panose="020B0600070205080204" pitchFamily="34" charset="-128"/>
-              </a:defRPr>
-            </a:lvl4pPr>
-            <a:lvl5pPr marL="2057400" indent="-228600">
-              <a:spcBef>
-                <a:spcPct val="20000"/>
-              </a:spcBef>
-              <a:buFont typeface="Arial" panose="020B0604020202020204" pitchFamily="34" charset="0"/>
-              <a:buChar char="»"/>
-              <a:defRPr sz="2000">
-                <a:solidFill>
-                  <a:schemeClr val="tx1"/>
-                </a:solidFill>
-                <a:latin typeface="Calibri" panose="020F0502020204030204" pitchFamily="34" charset="0"/>
-                <a:ea typeface="ＭＳ Ｐゴシック" panose="020B0600070205080204" pitchFamily="34" charset="-128"/>
-              </a:defRPr>
-            </a:lvl5pPr>
-            <a:lvl6pPr marL="2514600" indent="-228600" eaLnBrk="0" fontAlgn="base" hangingPunct="0">
-              <a:spcBef>
-                <a:spcPct val="20000"/>
-              </a:spcBef>
-              <a:spcAft>
-                <a:spcPct val="0"/>
-              </a:spcAft>
-              <a:buFont typeface="Arial" panose="020B0604020202020204" pitchFamily="34" charset="0"/>
-              <a:buChar char="»"/>
-              <a:defRPr sz="2000">
-                <a:solidFill>
-                  <a:schemeClr val="tx1"/>
-                </a:solidFill>
-                <a:latin typeface="Calibri" panose="020F0502020204030204" pitchFamily="34" charset="0"/>
-                <a:ea typeface="ＭＳ Ｐゴシック" panose="020B0600070205080204" pitchFamily="34" charset="-128"/>
-              </a:defRPr>
-            </a:lvl6pPr>
-            <a:lvl7pPr marL="2971800" indent="-228600" eaLnBrk="0" fontAlgn="base" hangingPunct="0">
-              <a:spcBef>
-                <a:spcPct val="20000"/>
-              </a:spcBef>
-              <a:spcAft>
-                <a:spcPct val="0"/>
-              </a:spcAft>
-              <a:buFont typeface="Arial" panose="020B0604020202020204" pitchFamily="34" charset="0"/>
-              <a:buChar char="»"/>
-              <a:defRPr sz="2000">
-                <a:solidFill>
-                  <a:schemeClr val="tx1"/>
-                </a:solidFill>
-                <a:latin typeface="Calibri" panose="020F0502020204030204" pitchFamily="34" charset="0"/>
-                <a:ea typeface="ＭＳ Ｐゴシック" panose="020B0600070205080204" pitchFamily="34" charset="-128"/>
-              </a:defRPr>
-            </a:lvl7pPr>
-            <a:lvl8pPr marL="3429000" indent="-228600" eaLnBrk="0" fontAlgn="base" hangingPunct="0">
-              <a:spcBef>
-                <a:spcPct val="20000"/>
-              </a:spcBef>
-              <a:spcAft>
-                <a:spcPct val="0"/>
-              </a:spcAft>
-              <a:buFont typeface="Arial" panose="020B0604020202020204" pitchFamily="34" charset="0"/>
-              <a:buChar char="»"/>
-              <a:defRPr sz="2000">
-                <a:solidFill>
-                  <a:schemeClr val="tx1"/>
-                </a:solidFill>
-                <a:latin typeface="Calibri" panose="020F0502020204030204" pitchFamily="34" charset="0"/>
-                <a:ea typeface="ＭＳ Ｐゴシック" panose="020B0600070205080204" pitchFamily="34" charset="-128"/>
-              </a:defRPr>
-            </a:lvl8pPr>
-            <a:lvl9pPr marL="3886200" indent="-228600" eaLnBrk="0" fontAlgn="base" hangingPunct="0">
-              <a:spcBef>
-                <a:spcPct val="20000"/>
-              </a:spcBef>
-              <a:spcAft>
-                <a:spcPct val="0"/>
-              </a:spcAft>
-              <a:buFont typeface="Arial" panose="020B0604020202020204" pitchFamily="34" charset="0"/>
-              <a:buChar char="»"/>
-              <a:defRPr sz="2000">
-                <a:solidFill>
-                  <a:schemeClr val="tx1"/>
-                </a:solidFill>
-                <a:latin typeface="Calibri" panose="020F0502020204030204" pitchFamily="34" charset="0"/>
-                <a:ea typeface="ＭＳ Ｐゴシック" panose="020B0600070205080204" pitchFamily="34" charset="-128"/>
-              </a:defRPr>
-            </a:lvl9pPr>
-          </a:lstStyle>
-          <a:p>
-            <a:pPr>
-              <a:spcBef>
-                <a:spcPct val="0"/>
-              </a:spcBef>
-              <a:buFontTx/>
-              <a:buNone/>
-            </a:pPr>
-            <a:fld id="{233AF9ED-22CF-4A0A-BBD8-3C277346AB9E}" type="slidenum">
-              <a:rPr lang="en-US" altLang="en-US" sz="1200">
-                <a:solidFill>
-                  <a:srgbClr val="898989"/>
-                </a:solidFill>
-                <a:latin typeface="Arial" panose="020B0604020202020204" pitchFamily="34" charset="0"/>
-              </a:rPr>
-              <a:pPr>
-                <a:spcBef>
-                  <a:spcPct val="0"/>
-                </a:spcBef>
-                <a:buFontTx/>
-                <a:buNone/>
-              </a:pPr>
-              <a:t>13</a:t>
-            </a:fld>
-            <a:endParaRPr lang="en-US" altLang="en-US" sz="1200">
-              <a:solidFill>
-                <a:srgbClr val="898989"/>
-              </a:solidFill>
-              <a:latin typeface="Arial" panose="020B0604020202020204" pitchFamily="34" charset="0"/>
-            </a:endParaRPr>
-          </a:p>
-        </p:txBody>
-      </p:sp>
-    </p:spTree>
-  </p:cSld>
-  <p:clrMapOvr>
-    <a:masterClrMapping/>
-  </p:clrMapOvr>
-</p:sld>
-</file>
-
 <file path=ppt/slides/slide2.xml><?xml version="1.0" encoding="utf-8"?>
 <p:sld xmlns:a="http://schemas.openxmlformats.org/drawingml/2006/main" xmlns:r="http://schemas.openxmlformats.org/officeDocument/2006/relationships" xmlns:p="http://schemas.openxmlformats.org/presentationml/2006/main">
   <p:cSld>
@@ -9029,7 +8820,7 @@
               <a:rPr lang="en-US" altLang="en-US" sz="2000" b="1" dirty="0">
                 <a:ea typeface="ＭＳ Ｐゴシック" panose="020B0600070205080204" pitchFamily="34" charset="-128"/>
               </a:rPr>
-              <a:t>Declarative style.</a:t>
+              <a:t>Declarative style</a:t>
             </a:r>
           </a:p>
           <a:p>
@@ -12948,10 +12739,10 @@
       </p:pic>
       <p:pic>
         <p:nvPicPr>
-          <p:cNvPr id="5" name="Picture 4">
+          <p:cNvPr id="7" name="Picture 6">
             <a:extLst>
               <a:ext uri="{FF2B5EF4-FFF2-40B4-BE49-F238E27FC236}">
-                <a16:creationId xmlns:a16="http://schemas.microsoft.com/office/drawing/2014/main" id="{1A6D061C-C682-7126-C712-5ECA7D4C6496}"/>
+                <a16:creationId xmlns:a16="http://schemas.microsoft.com/office/drawing/2014/main" id="{47E6531F-EDE7-4715-E595-7F576F95BB27}"/>
               </a:ext>
             </a:extLst>
           </p:cNvPr>
@@ -12962,14 +12753,15 @@
         </p:nvPicPr>
         <p:blipFill>
           <a:blip r:embed="rId3"/>
+          <a:srcRect r="29469"/>
           <a:stretch>
             <a:fillRect/>
           </a:stretch>
         </p:blipFill>
         <p:spPr>
           <a:xfrm>
-            <a:off x="6191693" y="2311342"/>
-            <a:ext cx="4883401" cy="2235315"/>
+            <a:off x="5791200" y="2133599"/>
+            <a:ext cx="2743200" cy="2573175"/>
           </a:xfrm>
           <a:prstGeom prst="rect">
             <a:avLst/>
@@ -15108,7 +14900,7 @@
               <a:buNone/>
             </a:pPr>
             <a:fld id="{31CD273F-1E3A-4017-8807-05725F0EDE2C}" type="slidenum">
-              <a:rPr lang="en-US" altLang="en-US" sz="1200">
+              <a:rPr lang="en-US" altLang="en-US" sz="1200" smtClean="0">
                 <a:latin typeface="Arial" panose="020B0604020202020204" pitchFamily="34" charset="0"/>
               </a:rPr>
               <a:pPr>
@@ -15935,7 +15727,7 @@
         </p:blipFill>
         <p:spPr>
           <a:xfrm>
-            <a:off x="3124200" y="1219200"/>
+            <a:off x="304800" y="1127124"/>
             <a:ext cx="5131064" cy="2959252"/>
           </a:xfrm>
           <a:prstGeom prst="rect">
@@ -15943,6 +15735,240 @@
           </a:prstGeom>
         </p:spPr>
       </p:pic>
+      <p:pic>
+        <p:nvPicPr>
+          <p:cNvPr id="4" name="Picture 3">
+            <a:extLst>
+              <a:ext uri="{FF2B5EF4-FFF2-40B4-BE49-F238E27FC236}">
+                <a16:creationId xmlns:a16="http://schemas.microsoft.com/office/drawing/2014/main" id="{BE881DEA-E525-4C8C-506A-F967B397C3CD}"/>
+              </a:ext>
+            </a:extLst>
+          </p:cNvPr>
+          <p:cNvPicPr>
+            <a:picLocks noChangeAspect="1"/>
+          </p:cNvPicPr>
+          <p:nvPr/>
+        </p:nvPicPr>
+        <p:blipFill>
+          <a:blip r:embed="rId3"/>
+          <a:stretch>
+            <a:fillRect/>
+          </a:stretch>
+        </p:blipFill>
+        <p:spPr>
+          <a:xfrm>
+            <a:off x="6756138" y="1127124"/>
+            <a:ext cx="2705239" cy="1219263"/>
+          </a:xfrm>
+          <a:prstGeom prst="rect">
+            <a:avLst/>
+          </a:prstGeom>
+        </p:spPr>
+      </p:pic>
+      <mc:AlternateContent xmlns:mc="http://schemas.openxmlformats.org/markup-compatibility/2006">
+        <mc:Choice xmlns:p14="http://schemas.microsoft.com/office/powerpoint/2010/main" Requires="p14">
+          <p:contentPart p14:bwMode="auto" r:id="rId4">
+            <p14:nvContentPartPr>
+              <p14:cNvPr id="6" name="Ink 5">
+                <a:extLst>
+                  <a:ext uri="{FF2B5EF4-FFF2-40B4-BE49-F238E27FC236}">
+                    <a16:creationId xmlns:a16="http://schemas.microsoft.com/office/drawing/2014/main" id="{B16D3DD1-4BAE-B6DB-FDC4-5B3686B309C5}"/>
+                  </a:ext>
+                </a:extLst>
+              </p14:cNvPr>
+              <p14:cNvContentPartPr/>
+              <p14:nvPr/>
+            </p14:nvContentPartPr>
+            <p14:xfrm>
+              <a:off x="4656642" y="1857003"/>
+              <a:ext cx="2077200" cy="283680"/>
+            </p14:xfrm>
+          </p:contentPart>
+        </mc:Choice>
+        <mc:Fallback>
+          <p:pic>
+            <p:nvPicPr>
+              <p:cNvPr id="6" name="Ink 5">
+                <a:extLst>
+                  <a:ext uri="{FF2B5EF4-FFF2-40B4-BE49-F238E27FC236}">
+                    <a16:creationId xmlns:a16="http://schemas.microsoft.com/office/drawing/2014/main" id="{B16D3DD1-4BAE-B6DB-FDC4-5B3686B309C5}"/>
+                  </a:ext>
+                </a:extLst>
+              </p:cNvPr>
+              <p:cNvPicPr/>
+              <p:nvPr/>
+            </p:nvPicPr>
+            <p:blipFill>
+              <a:blip r:embed="rId5"/>
+              <a:stretch>
+                <a:fillRect/>
+              </a:stretch>
+            </p:blipFill>
+            <p:spPr>
+              <a:xfrm>
+                <a:off x="4650522" y="1850883"/>
+                <a:ext cx="2089440" cy="295920"/>
+              </a:xfrm>
+              <a:prstGeom prst="rect">
+                <a:avLst/>
+              </a:prstGeom>
+            </p:spPr>
+          </p:pic>
+        </mc:Fallback>
+      </mc:AlternateContent>
+      <mc:AlternateContent xmlns:mc="http://schemas.openxmlformats.org/markup-compatibility/2006">
+        <mc:Choice xmlns:p14="http://schemas.microsoft.com/office/powerpoint/2010/main" Requires="p14">
+          <p:contentPart p14:bwMode="auto" r:id="rId6">
+            <p14:nvContentPartPr>
+              <p14:cNvPr id="8" name="Ink 7">
+                <a:extLst>
+                  <a:ext uri="{FF2B5EF4-FFF2-40B4-BE49-F238E27FC236}">
+                    <a16:creationId xmlns:a16="http://schemas.microsoft.com/office/drawing/2014/main" id="{9C36066A-1D96-094B-46BF-D2EE2559C4C1}"/>
+                  </a:ext>
+                </a:extLst>
+              </p14:cNvPr>
+              <p14:cNvContentPartPr/>
+              <p14:nvPr/>
+            </p14:nvContentPartPr>
+            <p14:xfrm>
+              <a:off x="6570762" y="1857003"/>
+              <a:ext cx="156240" cy="7200"/>
+            </p14:xfrm>
+          </p:contentPart>
+        </mc:Choice>
+        <mc:Fallback>
+          <p:pic>
+            <p:nvPicPr>
+              <p:cNvPr id="8" name="Ink 7">
+                <a:extLst>
+                  <a:ext uri="{FF2B5EF4-FFF2-40B4-BE49-F238E27FC236}">
+                    <a16:creationId xmlns:a16="http://schemas.microsoft.com/office/drawing/2014/main" id="{9C36066A-1D96-094B-46BF-D2EE2559C4C1}"/>
+                  </a:ext>
+                </a:extLst>
+              </p:cNvPr>
+              <p:cNvPicPr/>
+              <p:nvPr/>
+            </p:nvPicPr>
+            <p:blipFill>
+              <a:blip r:embed="rId7"/>
+              <a:stretch>
+                <a:fillRect/>
+              </a:stretch>
+            </p:blipFill>
+            <p:spPr>
+              <a:xfrm>
+                <a:off x="6564642" y="1850883"/>
+                <a:ext cx="168480" cy="19440"/>
+              </a:xfrm>
+              <a:prstGeom prst="rect">
+                <a:avLst/>
+              </a:prstGeom>
+            </p:spPr>
+          </p:pic>
+        </mc:Fallback>
+      </mc:AlternateContent>
+      <mc:AlternateContent xmlns:mc="http://schemas.openxmlformats.org/markup-compatibility/2006">
+        <mc:Choice xmlns:p14="http://schemas.microsoft.com/office/powerpoint/2010/main" Requires="p14">
+          <p:contentPart p14:bwMode="auto" r:id="rId8">
+            <p14:nvContentPartPr>
+              <p14:cNvPr id="9" name="Ink 8">
+                <a:extLst>
+                  <a:ext uri="{FF2B5EF4-FFF2-40B4-BE49-F238E27FC236}">
+                    <a16:creationId xmlns:a16="http://schemas.microsoft.com/office/drawing/2014/main" id="{E7D921EA-CE2F-3DD4-D5AF-907F89F78FEB}"/>
+                  </a:ext>
+                </a:extLst>
+              </p14:cNvPr>
+              <p14:cNvContentPartPr/>
+              <p14:nvPr/>
+            </p14:nvContentPartPr>
+            <p14:xfrm>
+              <a:off x="6604602" y="1871043"/>
+              <a:ext cx="108000" cy="54720"/>
+            </p14:xfrm>
+          </p:contentPart>
+        </mc:Choice>
+        <mc:Fallback>
+          <p:pic>
+            <p:nvPicPr>
+              <p:cNvPr id="9" name="Ink 8">
+                <a:extLst>
+                  <a:ext uri="{FF2B5EF4-FFF2-40B4-BE49-F238E27FC236}">
+                    <a16:creationId xmlns:a16="http://schemas.microsoft.com/office/drawing/2014/main" id="{E7D921EA-CE2F-3DD4-D5AF-907F89F78FEB}"/>
+                  </a:ext>
+                </a:extLst>
+              </p:cNvPr>
+              <p:cNvPicPr/>
+              <p:nvPr/>
+            </p:nvPicPr>
+            <p:blipFill>
+              <a:blip r:embed="rId9"/>
+              <a:stretch>
+                <a:fillRect/>
+              </a:stretch>
+            </p:blipFill>
+            <p:spPr>
+              <a:xfrm>
+                <a:off x="6598482" y="1864923"/>
+                <a:ext cx="120240" cy="66960"/>
+              </a:xfrm>
+              <a:prstGeom prst="rect">
+                <a:avLst/>
+              </a:prstGeom>
+            </p:spPr>
+          </p:pic>
+        </mc:Fallback>
+      </mc:AlternateContent>
+      <mc:AlternateContent xmlns:mc="http://schemas.openxmlformats.org/markup-compatibility/2006">
+        <mc:Choice xmlns:p14="http://schemas.microsoft.com/office/powerpoint/2010/main" Requires="p14">
+          <p:contentPart p14:bwMode="auto" r:id="rId10">
+            <p14:nvContentPartPr>
+              <p14:cNvPr id="10" name="Ink 9">
+                <a:extLst>
+                  <a:ext uri="{FF2B5EF4-FFF2-40B4-BE49-F238E27FC236}">
+                    <a16:creationId xmlns:a16="http://schemas.microsoft.com/office/drawing/2014/main" id="{A24CE644-742C-FD05-65B7-98425B646C3A}"/>
+                  </a:ext>
+                </a:extLst>
+              </p14:cNvPr>
+              <p14:cNvContentPartPr/>
+              <p14:nvPr/>
+            </p14:nvContentPartPr>
+            <p14:xfrm>
+              <a:off x="6648882" y="2381523"/>
+              <a:ext cx="360" cy="360"/>
+            </p14:xfrm>
+          </p:contentPart>
+        </mc:Choice>
+        <mc:Fallback>
+          <p:pic>
+            <p:nvPicPr>
+              <p:cNvPr id="10" name="Ink 9">
+                <a:extLst>
+                  <a:ext uri="{FF2B5EF4-FFF2-40B4-BE49-F238E27FC236}">
+                    <a16:creationId xmlns:a16="http://schemas.microsoft.com/office/drawing/2014/main" id="{A24CE644-742C-FD05-65B7-98425B646C3A}"/>
+                  </a:ext>
+                </a:extLst>
+              </p:cNvPr>
+              <p:cNvPicPr/>
+              <p:nvPr/>
+            </p:nvPicPr>
+            <p:blipFill>
+              <a:blip r:embed="rId11"/>
+              <a:stretch>
+                <a:fillRect/>
+              </a:stretch>
+            </p:blipFill>
+            <p:spPr>
+              <a:xfrm>
+                <a:off x="6642762" y="2375403"/>
+                <a:ext cx="12600" cy="12600"/>
+              </a:xfrm>
+              <a:prstGeom prst="rect">
+                <a:avLst/>
+              </a:prstGeom>
+            </p:spPr>
+          </p:pic>
+        </mc:Fallback>
+      </mc:AlternateContent>
     </p:spTree>
   </p:cSld>
   <p:clrMapOvr>
